--- a/ppt/4. Redis로 API요청횟수 제한 구현하기.pptx
+++ b/ppt/4. Redis로 API요청횟수 제한 구현하기.pptx
@@ -134,6 +134,9 @@
         </p14:section>
       </p14:sectionLst>
     </p:ext>
+    <p:ext uri="{EFAFB233-063F-42B5-8137-9DF3F51BA10A}">
+      <p15:sldGuideLst xmlns:p15="http://schemas.microsoft.com/office/powerpoint/2012/main"/>
+    </p:ext>
   </p:extLst>
 </p:presentation>
 </file>
@@ -364,7 +367,7 @@
           <a:p>
             <a:fld id="{C44A4378-CF11-4666-8C60-C10C97F5D4C1}" type="datetimeFigureOut">
               <a:rPr lang="ko-KR" altLang="en-US" smtClean="0"/>
-              <a:t>2026-08-28</a:t>
+              <a:t>2026-08-29</a:t>
             </a:fld>
             <a:endParaRPr lang="ko-KR" altLang="en-US"/>
           </a:p>
@@ -572,7 +575,7 @@
           <a:p>
             <a:fld id="{C44A4378-CF11-4666-8C60-C10C97F5D4C1}" type="datetimeFigureOut">
               <a:rPr lang="ko-KR" altLang="en-US" smtClean="0"/>
-              <a:t>2026-08-28</a:t>
+              <a:t>2026-08-29</a:t>
             </a:fld>
             <a:endParaRPr lang="ko-KR" altLang="en-US"/>
           </a:p>
@@ -828,7 +831,7 @@
           <a:p>
             <a:fld id="{C44A4378-CF11-4666-8C60-C10C97F5D4C1}" type="datetimeFigureOut">
               <a:rPr lang="ko-KR" altLang="en-US" smtClean="0"/>
-              <a:t>2026-08-28</a:t>
+              <a:t>2026-08-29</a:t>
             </a:fld>
             <a:endParaRPr lang="ko-KR" altLang="en-US"/>
           </a:p>
@@ -1002,7 +1005,7 @@
           <a:p>
             <a:fld id="{C44A4378-CF11-4666-8C60-C10C97F5D4C1}" type="datetimeFigureOut">
               <a:rPr lang="ko-KR" altLang="en-US" smtClean="0"/>
-              <a:t>2026-08-28</a:t>
+              <a:t>2026-08-29</a:t>
             </a:fld>
             <a:endParaRPr lang="ko-KR" altLang="en-US"/>
           </a:p>
@@ -1345,7 +1348,7 @@
           <a:p>
             <a:fld id="{C44A4378-CF11-4666-8C60-C10C97F5D4C1}" type="datetimeFigureOut">
               <a:rPr lang="ko-KR" altLang="en-US" smtClean="0"/>
-              <a:t>2026-08-28</a:t>
+              <a:t>2026-08-29</a:t>
             </a:fld>
             <a:endParaRPr lang="ko-KR" altLang="en-US"/>
           </a:p>
@@ -1620,7 +1623,7 @@
           <a:p>
             <a:fld id="{C44A4378-CF11-4666-8C60-C10C97F5D4C1}" type="datetimeFigureOut">
               <a:rPr lang="ko-KR" altLang="en-US" smtClean="0"/>
-              <a:t>2026-08-28</a:t>
+              <a:t>2026-08-29</a:t>
             </a:fld>
             <a:endParaRPr lang="ko-KR" altLang="en-US"/>
           </a:p>
@@ -1999,7 +2002,7 @@
           <a:p>
             <a:fld id="{C44A4378-CF11-4666-8C60-C10C97F5D4C1}" type="datetimeFigureOut">
               <a:rPr lang="ko-KR" altLang="en-US" smtClean="0"/>
-              <a:t>2026-08-28</a:t>
+              <a:t>2026-08-29</a:t>
             </a:fld>
             <a:endParaRPr lang="ko-KR" altLang="en-US"/>
           </a:p>
@@ -2117,7 +2120,7 @@
           <a:p>
             <a:fld id="{C44A4378-CF11-4666-8C60-C10C97F5D4C1}" type="datetimeFigureOut">
               <a:rPr lang="ko-KR" altLang="en-US" smtClean="0"/>
-              <a:t>2026-08-28</a:t>
+              <a:t>2026-08-29</a:t>
             </a:fld>
             <a:endParaRPr lang="ko-KR" altLang="en-US"/>
           </a:p>
@@ -2288,7 +2291,7 @@
           <a:p>
             <a:fld id="{C44A4378-CF11-4666-8C60-C10C97F5D4C1}" type="datetimeFigureOut">
               <a:rPr lang="ko-KR" altLang="en-US" smtClean="0"/>
-              <a:t>2026-08-28</a:t>
+              <a:t>2026-08-29</a:t>
             </a:fld>
             <a:endParaRPr lang="ko-KR" altLang="en-US"/>
           </a:p>
@@ -2642,7 +2645,7 @@
           <a:p>
             <a:fld id="{C44A4378-CF11-4666-8C60-C10C97F5D4C1}" type="datetimeFigureOut">
               <a:rPr lang="ko-KR" altLang="en-US" smtClean="0"/>
-              <a:t>2026-08-28</a:t>
+              <a:t>2026-08-29</a:t>
             </a:fld>
             <a:endParaRPr lang="ko-KR" altLang="en-US"/>
           </a:p>
@@ -3024,7 +3027,7 @@
           <a:p>
             <a:fld id="{C44A4378-CF11-4666-8C60-C10C97F5D4C1}" type="datetimeFigureOut">
               <a:rPr lang="ko-KR" altLang="en-US" smtClean="0"/>
-              <a:t>2026-08-28</a:t>
+              <a:t>2026-08-29</a:t>
             </a:fld>
             <a:endParaRPr lang="ko-KR" altLang="en-US"/>
           </a:p>
@@ -3311,7 +3314,7 @@
           <a:p>
             <a:fld id="{C44A4378-CF11-4666-8C60-C10C97F5D4C1}" type="datetimeFigureOut">
               <a:rPr lang="ko-KR" altLang="en-US" smtClean="0"/>
-              <a:t>2026-08-28</a:t>
+              <a:t>2026-08-29</a:t>
             </a:fld>
             <a:endParaRPr lang="ko-KR" altLang="en-US"/>
           </a:p>
@@ -5253,12 +5256,268 @@
           </p:txBody>
         </p:sp>
       </p:grpSp>
+      <p:sp>
+        <p:nvSpPr>
+          <p:cNvPr id="9" name="TextBox 8">
+            <a:extLst>
+              <a:ext uri="{FF2B5EF4-FFF2-40B4-BE49-F238E27FC236}">
+                <a16:creationId xmlns:a16="http://schemas.microsoft.com/office/drawing/2014/main" id="{AA84259B-F667-8FCF-B45E-C7F3BB4BD68F}"/>
+              </a:ext>
+            </a:extLst>
+          </p:cNvPr>
+          <p:cNvSpPr txBox="1"/>
+          <p:nvPr/>
+        </p:nvSpPr>
+        <p:spPr>
+          <a:xfrm>
+            <a:off x="6638795" y="1874925"/>
+            <a:ext cx="5329824" cy="1631216"/>
+          </a:xfrm>
+          <a:prstGeom prst="rect">
+            <a:avLst/>
+          </a:prstGeom>
+          <a:noFill/>
+        </p:spPr>
+        <p:txBody>
+          <a:bodyPr wrap="square" rtlCol="0">
+            <a:spAutoFit/>
+          </a:bodyPr>
+          <a:lstStyle/>
+          <a:p>
+            <a:r>
+              <a:rPr lang="en-US" altLang="ko-KR" sz="1000"/>
+              <a:t>15~19Line : </a:t>
+            </a:r>
+            <a:r>
+              <a:rPr lang="ko-KR" altLang="en-US" sz="1000"/>
+              <a:t>요청에대한 제한 유효성검사를 위해 작성한 </a:t>
+            </a:r>
+            <a:r>
+              <a:rPr lang="en-US" altLang="ko-KR" sz="1000"/>
+              <a:t>RateLimiter </a:t>
+            </a:r>
+            <a:r>
+              <a:rPr lang="ko-KR" altLang="en-US" sz="1000"/>
+              <a:t>인스턴스의 의존성 주입</a:t>
+            </a:r>
+            <a:endParaRPr lang="en-US" altLang="ko-KR" sz="1000"/>
+          </a:p>
+          <a:p>
+            <a:r>
+              <a:rPr lang="en-US" altLang="ko-KR" sz="1000"/>
+              <a:t>21~22Line : </a:t>
+            </a:r>
+            <a:r>
+              <a:rPr lang="ko-KR" altLang="en-US" sz="1000"/>
+              <a:t>각 요청마다 동작하도록 하는 </a:t>
+            </a:r>
+            <a:r>
+              <a:rPr lang="en-US" altLang="ko-KR" sz="1000"/>
+              <a:t>OncePerRequestFilter [AOP </a:t>
+            </a:r>
+            <a:r>
+              <a:rPr lang="ko-KR" altLang="en-US" sz="1000"/>
+              <a:t>동작</a:t>
+            </a:r>
+            <a:r>
+              <a:rPr lang="en-US" altLang="ko-KR" sz="1000"/>
+              <a:t>]</a:t>
+            </a:r>
+          </a:p>
+          <a:p>
+            <a:endParaRPr lang="en-US" altLang="ko-KR" sz="1000"/>
+          </a:p>
+          <a:p>
+            <a:r>
+              <a:rPr lang="en-US" altLang="ko-KR" sz="1000"/>
+              <a:t>21~38Line</a:t>
+            </a:r>
+            <a:r>
+              <a:rPr lang="ko-KR" altLang="en-US" sz="1000"/>
+              <a:t> </a:t>
+            </a:r>
+            <a:r>
+              <a:rPr lang="en-US" altLang="ko-KR" sz="1000"/>
+              <a:t>:</a:t>
+            </a:r>
+            <a:r>
+              <a:rPr lang="ko-KR" altLang="en-US" sz="1000"/>
+              <a:t> </a:t>
+            </a:r>
+            <a:br>
+              <a:rPr lang="en-US" altLang="ko-KR" sz="1000"/>
+            </a:br>
+            <a:r>
+              <a:rPr lang="en-US" altLang="ko-KR" sz="1000"/>
+              <a:t>- HEADER</a:t>
+            </a:r>
+            <a:r>
+              <a:rPr lang="ko-KR" altLang="en-US" sz="1000"/>
+              <a:t>로 부터 </a:t>
+            </a:r>
+            <a:r>
+              <a:rPr lang="en-US" altLang="ko-KR" sz="1000"/>
+              <a:t>userId </a:t>
+            </a:r>
+            <a:r>
+              <a:rPr lang="ko-KR" altLang="en-US" sz="1000"/>
+              <a:t>추출</a:t>
+            </a:r>
+            <a:endParaRPr lang="en-US" altLang="ko-KR" sz="1000"/>
+          </a:p>
+          <a:p>
+            <a:pPr marL="171450" indent="-171450">
+              <a:buFontTx/>
+              <a:buChar char="-"/>
+            </a:pPr>
+            <a:r>
+              <a:rPr lang="en-US" altLang="ko-KR" sz="1000"/>
+              <a:t>userId</a:t>
+            </a:r>
+            <a:r>
+              <a:rPr lang="ko-KR" altLang="en-US" sz="1000"/>
+              <a:t>가 없다면 헤더에 </a:t>
+            </a:r>
+            <a:r>
+              <a:rPr lang="en-US" altLang="ko-KR" sz="1000"/>
+              <a:t>userId</a:t>
+            </a:r>
+            <a:r>
+              <a:rPr lang="ko-KR" altLang="en-US" sz="1000"/>
+              <a:t>가 필요없는 요청 </a:t>
+            </a:r>
+            <a:r>
+              <a:rPr lang="en-US" altLang="ko-KR" sz="1000"/>
+              <a:t>(</a:t>
+            </a:r>
+            <a:r>
+              <a:rPr lang="ko-KR" altLang="en-US" sz="1000"/>
+              <a:t>실습 프로젝트의 특성</a:t>
+            </a:r>
+            <a:r>
+              <a:rPr lang="en-US" altLang="ko-KR" sz="1000"/>
+              <a:t>) </a:t>
+            </a:r>
+            <a:r>
+              <a:rPr lang="ko-KR" altLang="en-US" sz="1000"/>
+              <a:t>임으로 </a:t>
+            </a:r>
+            <a:br>
+              <a:rPr lang="en-US" altLang="ko-KR" sz="1000"/>
+            </a:br>
+            <a:r>
+              <a:rPr lang="en-US" altLang="ko-KR" sz="1000"/>
+              <a:t>request</a:t>
+            </a:r>
+            <a:r>
+              <a:rPr lang="ko-KR" altLang="en-US" sz="1000"/>
+              <a:t>와 </a:t>
+            </a:r>
+            <a:r>
+              <a:rPr lang="en-US" altLang="ko-KR" sz="1000"/>
+              <a:t>response </a:t>
+            </a:r>
+            <a:r>
+              <a:rPr lang="ko-KR" altLang="en-US" sz="1000"/>
+              <a:t>가 </a:t>
+            </a:r>
+            <a:r>
+              <a:rPr lang="en-US" altLang="ko-KR" sz="1000"/>
+              <a:t>filter</a:t>
+            </a:r>
+            <a:r>
+              <a:rPr lang="ko-KR" altLang="en-US" sz="1000"/>
+              <a:t> 통과처리를 해준다</a:t>
+            </a:r>
+            <a:r>
+              <a:rPr lang="en-US" altLang="ko-KR" sz="1000"/>
+              <a:t>.</a:t>
+            </a:r>
+            <a:br>
+              <a:rPr lang="en-US" altLang="ko-KR" sz="1000"/>
+            </a:br>
+            <a:r>
+              <a:rPr lang="en-US" altLang="ko-KR" sz="1000"/>
+              <a:t>( filterChain.doFilter(request, response) )</a:t>
+            </a:r>
+          </a:p>
+          <a:p>
+            <a:pPr marL="171450" indent="-171450">
+              <a:buFontTx/>
+              <a:buChar char="-"/>
+            </a:pPr>
+            <a:r>
+              <a:rPr lang="ko-KR" altLang="en-US" sz="1000"/>
+              <a:t>조건에 대해 만족하지 못하였다면</a:t>
+            </a:r>
+            <a:r>
+              <a:rPr lang="en-US" altLang="ko-KR" sz="1000"/>
+              <a:t>, if </a:t>
+            </a:r>
+            <a:r>
+              <a:rPr lang="ko-KR" altLang="en-US" sz="1000"/>
+              <a:t>문이 동작하며</a:t>
+            </a:r>
+            <a:r>
+              <a:rPr lang="en-US" altLang="ko-KR" sz="1000"/>
+              <a:t>, 429 [</a:t>
+            </a:r>
+            <a:r>
+              <a:rPr lang="ko-KR" altLang="en-US" sz="1000"/>
+              <a:t>너무 많은 요청 코드 에러</a:t>
+            </a:r>
+            <a:r>
+              <a:rPr lang="en-US" altLang="ko-KR" sz="1000"/>
+              <a:t>] </a:t>
+            </a:r>
+            <a:r>
+              <a:rPr lang="ko-KR" altLang="en-US" sz="1000"/>
+              <a:t>발생</a:t>
+            </a:r>
+            <a:endParaRPr lang="en-US" altLang="ko-KR" sz="1000"/>
+          </a:p>
+          <a:p>
+            <a:pPr marL="171450" indent="-171450">
+              <a:buFontTx/>
+              <a:buChar char="-"/>
+            </a:pPr>
+            <a:r>
+              <a:rPr lang="ko-KR" altLang="en-US" sz="1000"/>
+              <a:t>조건에 대해 만족</a:t>
+            </a:r>
+            <a:r>
+              <a:rPr lang="en-US" altLang="ko-KR" sz="1000"/>
+              <a:t>(5</a:t>
+            </a:r>
+            <a:r>
+              <a:rPr lang="ko-KR" altLang="en-US" sz="1000"/>
+              <a:t>번 미만의 요청</a:t>
+            </a:r>
+            <a:r>
+              <a:rPr lang="en-US" altLang="ko-KR" sz="1000"/>
+              <a:t>) </a:t>
+            </a:r>
+            <a:r>
+              <a:rPr lang="ko-KR" altLang="en-US" sz="1000"/>
+              <a:t>할 경우</a:t>
+            </a:r>
+            <a:r>
+              <a:rPr lang="en-US" altLang="ko-KR" sz="1000"/>
+              <a:t>. </a:t>
+            </a:r>
+            <a:r>
+              <a:rPr lang="ko-KR" altLang="en-US" sz="1000"/>
+              <a:t>요청과 응답 인스턴스 정상 반환</a:t>
+            </a:r>
+          </a:p>
+        </p:txBody>
+      </p:sp>
       <p:pic>
         <p:nvPicPr>
-          <p:cNvPr id="8" name="그림 7">
+          <p:cNvPr id="10" name="그림 9">
             <a:extLst>
               <a:ext uri="{FF2B5EF4-FFF2-40B4-BE49-F238E27FC236}">
-                <a16:creationId xmlns:a16="http://schemas.microsoft.com/office/drawing/2014/main" id="{64402716-699B-CAAB-F264-77AF308D627B}"/>
+                <a16:creationId xmlns:a16="http://schemas.microsoft.com/office/drawing/2014/main" id="{6843D13D-27A5-F258-C7EF-44A2406F539F}"/>
               </a:ext>
             </a:extLst>
           </p:cNvPr>
@@ -5275,228 +5534,14 @@
         </p:blipFill>
         <p:spPr>
           <a:xfrm>
-            <a:off x="2672912" y="1874925"/>
-            <a:ext cx="3915778" cy="4049270"/>
+            <a:off x="2666111" y="1874925"/>
+            <a:ext cx="3972684" cy="4221447"/>
           </a:xfrm>
           <a:prstGeom prst="rect">
             <a:avLst/>
           </a:prstGeom>
         </p:spPr>
       </p:pic>
-      <p:sp>
-        <p:nvSpPr>
-          <p:cNvPr id="9" name="TextBox 8">
-            <a:extLst>
-              <a:ext uri="{FF2B5EF4-FFF2-40B4-BE49-F238E27FC236}">
-                <a16:creationId xmlns:a16="http://schemas.microsoft.com/office/drawing/2014/main" id="{AA84259B-F667-8FCF-B45E-C7F3BB4BD68F}"/>
-              </a:ext>
-            </a:extLst>
-          </p:cNvPr>
-          <p:cNvSpPr txBox="1"/>
-          <p:nvPr/>
-        </p:nvSpPr>
-        <p:spPr>
-          <a:xfrm>
-            <a:off x="6638795" y="1874925"/>
-            <a:ext cx="5329824" cy="1323439"/>
-          </a:xfrm>
-          <a:prstGeom prst="rect">
-            <a:avLst/>
-          </a:prstGeom>
-          <a:noFill/>
-        </p:spPr>
-        <p:txBody>
-          <a:bodyPr wrap="square" rtlCol="0">
-            <a:spAutoFit/>
-          </a:bodyPr>
-          <a:lstStyle/>
-          <a:p>
-            <a:r>
-              <a:rPr lang="en-US" altLang="ko-KR" sz="1000"/>
-              <a:t>15~19Line : </a:t>
-            </a:r>
-            <a:r>
-              <a:rPr lang="ko-KR" altLang="en-US" sz="1000"/>
-              <a:t>요청에대한 제한 유효성검사를 위해 작성한 </a:t>
-            </a:r>
-            <a:r>
-              <a:rPr lang="en-US" altLang="ko-KR" sz="1000"/>
-              <a:t>RateLimiter </a:t>
-            </a:r>
-            <a:r>
-              <a:rPr lang="ko-KR" altLang="en-US" sz="1000"/>
-              <a:t>인스턴스의 의존성 주입</a:t>
-            </a:r>
-            <a:endParaRPr lang="en-US" altLang="ko-KR" sz="1000"/>
-          </a:p>
-          <a:p>
-            <a:r>
-              <a:rPr lang="en-US" altLang="ko-KR" sz="1000"/>
-              <a:t>21~22Line : </a:t>
-            </a:r>
-            <a:r>
-              <a:rPr lang="ko-KR" altLang="en-US" sz="1000"/>
-              <a:t>각 요청마다 동작하도록 하는 </a:t>
-            </a:r>
-            <a:r>
-              <a:rPr lang="en-US" altLang="ko-KR" sz="1000"/>
-              <a:t>OncePerRequestFilter [AOP </a:t>
-            </a:r>
-            <a:r>
-              <a:rPr lang="ko-KR" altLang="en-US" sz="1000"/>
-              <a:t>동작</a:t>
-            </a:r>
-            <a:r>
-              <a:rPr lang="en-US" altLang="ko-KR" sz="1000"/>
-              <a:t>]</a:t>
-            </a:r>
-          </a:p>
-          <a:p>
-            <a:endParaRPr lang="en-US" altLang="ko-KR" sz="1000"/>
-          </a:p>
-          <a:p>
-            <a:r>
-              <a:rPr lang="en-US" altLang="ko-KR" sz="1000"/>
-              <a:t>21~38Line</a:t>
-            </a:r>
-            <a:r>
-              <a:rPr lang="ko-KR" altLang="en-US" sz="1000"/>
-              <a:t> </a:t>
-            </a:r>
-            <a:r>
-              <a:rPr lang="en-US" altLang="ko-KR" sz="1000"/>
-              <a:t>:</a:t>
-            </a:r>
-            <a:r>
-              <a:rPr lang="ko-KR" altLang="en-US" sz="1000"/>
-              <a:t> </a:t>
-            </a:r>
-            <a:br>
-              <a:rPr lang="en-US" altLang="ko-KR" sz="1000"/>
-            </a:br>
-            <a:r>
-              <a:rPr lang="en-US" altLang="ko-KR" sz="1000"/>
-              <a:t>- HEADER</a:t>
-            </a:r>
-            <a:r>
-              <a:rPr lang="ko-KR" altLang="en-US" sz="1000"/>
-              <a:t>로 부터 </a:t>
-            </a:r>
-            <a:r>
-              <a:rPr lang="en-US" altLang="ko-KR" sz="1000"/>
-              <a:t>userId </a:t>
-            </a:r>
-            <a:r>
-              <a:rPr lang="ko-KR" altLang="en-US" sz="1000"/>
-              <a:t>추출</a:t>
-            </a:r>
-            <a:endParaRPr lang="en-US" altLang="ko-KR" sz="1000"/>
-          </a:p>
-          <a:p>
-            <a:pPr marL="171450" indent="-171450">
-              <a:buFontTx/>
-              <a:buChar char="-"/>
-            </a:pPr>
-            <a:r>
-              <a:rPr lang="en-US" altLang="ko-KR" sz="1000"/>
-              <a:t>userId</a:t>
-            </a:r>
-            <a:r>
-              <a:rPr lang="ko-KR" altLang="en-US" sz="1000"/>
-              <a:t>가 없다면 잘못된 요청임으로 </a:t>
-            </a:r>
-            <a:r>
-              <a:rPr lang="en-US" altLang="ko-KR" sz="1000"/>
-              <a:t>return; [</a:t>
-            </a:r>
-            <a:r>
-              <a:rPr lang="ko-KR" altLang="en-US" sz="1000"/>
-              <a:t>아무런 동작 안함</a:t>
-            </a:r>
-            <a:r>
-              <a:rPr lang="en-US" altLang="ko-KR" sz="1000"/>
-              <a:t> </a:t>
-            </a:r>
-            <a:r>
-              <a:rPr lang="ko-KR" altLang="en-US" sz="1000"/>
-              <a:t>설정</a:t>
-            </a:r>
-            <a:r>
-              <a:rPr lang="en-US" altLang="ko-KR" sz="1000"/>
-              <a:t>]</a:t>
-            </a:r>
-          </a:p>
-          <a:p>
-            <a:pPr marL="171450" indent="-171450">
-              <a:buFontTx/>
-              <a:buChar char="-"/>
-            </a:pPr>
-            <a:r>
-              <a:rPr lang="ko-KR" altLang="en-US" sz="1000"/>
-              <a:t>조건에 대해 만족하지 못하였다면</a:t>
-            </a:r>
-            <a:r>
-              <a:rPr lang="en-US" altLang="ko-KR" sz="1000"/>
-              <a:t>, if </a:t>
-            </a:r>
-            <a:r>
-              <a:rPr lang="ko-KR" altLang="en-US" sz="1000"/>
-              <a:t>문이 동작하며</a:t>
-            </a:r>
-            <a:r>
-              <a:rPr lang="en-US" altLang="ko-KR" sz="1000"/>
-              <a:t>, 429 [</a:t>
-            </a:r>
-            <a:r>
-              <a:rPr lang="ko-KR" altLang="en-US" sz="1000"/>
-              <a:t>너무 많은 요청 코드 에러</a:t>
-            </a:r>
-            <a:r>
-              <a:rPr lang="en-US" altLang="ko-KR" sz="1000"/>
-              <a:t>] </a:t>
-            </a:r>
-            <a:r>
-              <a:rPr lang="ko-KR" altLang="en-US" sz="1000"/>
-              <a:t>발생</a:t>
-            </a:r>
-            <a:endParaRPr lang="en-US" altLang="ko-KR" sz="1000"/>
-          </a:p>
-          <a:p>
-            <a:pPr marL="171450" indent="-171450">
-              <a:buFontTx/>
-              <a:buChar char="-"/>
-            </a:pPr>
-            <a:r>
-              <a:rPr lang="ko-KR" altLang="en-US" sz="1000"/>
-              <a:t>조건에 대해 만족</a:t>
-            </a:r>
-            <a:r>
-              <a:rPr lang="en-US" altLang="ko-KR" sz="1000"/>
-              <a:t>(5</a:t>
-            </a:r>
-            <a:r>
-              <a:rPr lang="ko-KR" altLang="en-US" sz="1000"/>
-              <a:t>번 미만의 요청</a:t>
-            </a:r>
-            <a:r>
-              <a:rPr lang="en-US" altLang="ko-KR" sz="1000"/>
-              <a:t>) </a:t>
-            </a:r>
-            <a:r>
-              <a:rPr lang="ko-KR" altLang="en-US" sz="1000"/>
-              <a:t>할 경우</a:t>
-            </a:r>
-            <a:r>
-              <a:rPr lang="en-US" altLang="ko-KR" sz="1000"/>
-              <a:t>. </a:t>
-            </a:r>
-            <a:r>
-              <a:rPr lang="ko-KR" altLang="en-US" sz="1000"/>
-              <a:t>요청과 응답 인스턴스 정상 반환</a:t>
-            </a:r>
-          </a:p>
-        </p:txBody>
-      </p:sp>
     </p:spTree>
     <p:extLst>
       <p:ext uri="{BB962C8B-B14F-4D97-AF65-F5344CB8AC3E}">
